--- a/Email Analysis for Detecting Spam Messages/EmailAnalysisSystem (Review-01).pptx
+++ b/Email Analysis for Detecting Spam Messages/EmailAnalysisSystem (Review-01).pptx
@@ -266,7 +266,7 @@
           <a:p>
             <a:fld id="{45B1BC09-D557-492E-9C5D-E4CF9E078DE2}" type="datetimeFigureOut">
               <a:rPr lang="en-US" smtClean="0"/>
-              <a:t>9/11/2026</a:t>
+              <a:t>9/12/2026</a:t>
             </a:fld>
             <a:endParaRPr lang="en-US"/>
           </a:p>
@@ -469,7 +469,7 @@
           <a:p>
             <a:fld id="{45B1BC09-D557-492E-9C5D-E4CF9E078DE2}" type="datetimeFigureOut">
               <a:rPr lang="en-US" smtClean="0"/>
-              <a:t>9/11/2026</a:t>
+              <a:t>9/12/2026</a:t>
             </a:fld>
             <a:endParaRPr lang="en-US"/>
           </a:p>
@@ -672,7 +672,7 @@
           <a:p>
             <a:fld id="{45B1BC09-D557-492E-9C5D-E4CF9E078DE2}" type="datetimeFigureOut">
               <a:rPr lang="en-US" smtClean="0"/>
-              <a:t>9/11/2026</a:t>
+              <a:t>9/12/2026</a:t>
             </a:fld>
             <a:endParaRPr lang="en-US"/>
           </a:p>
@@ -875,7 +875,7 @@
           <a:p>
             <a:fld id="{45B1BC09-D557-492E-9C5D-E4CF9E078DE2}" type="datetimeFigureOut">
               <a:rPr lang="en-US" smtClean="0"/>
-              <a:t>9/11/2026</a:t>
+              <a:t>9/12/2026</a:t>
             </a:fld>
             <a:endParaRPr lang="en-US"/>
           </a:p>
@@ -1145,7 +1145,7 @@
           <a:p>
             <a:fld id="{45B1BC09-D557-492E-9C5D-E4CF9E078DE2}" type="datetimeFigureOut">
               <a:rPr lang="en-US" smtClean="0"/>
-              <a:t>9/11/2026</a:t>
+              <a:t>9/12/2026</a:t>
             </a:fld>
             <a:endParaRPr lang="en-US"/>
           </a:p>
@@ -1407,7 +1407,7 @@
           <a:p>
             <a:fld id="{45B1BC09-D557-492E-9C5D-E4CF9E078DE2}" type="datetimeFigureOut">
               <a:rPr lang="en-US" smtClean="0"/>
-              <a:t>9/11/2026</a:t>
+              <a:t>9/12/2026</a:t>
             </a:fld>
             <a:endParaRPr lang="en-US"/>
           </a:p>
@@ -1805,7 +1805,7 @@
           <a:p>
             <a:fld id="{45B1BC09-D557-492E-9C5D-E4CF9E078DE2}" type="datetimeFigureOut">
               <a:rPr lang="en-US" smtClean="0"/>
-              <a:t>9/11/2026</a:t>
+              <a:t>9/12/2026</a:t>
             </a:fld>
             <a:endParaRPr lang="en-US"/>
           </a:p>
@@ -1949,7 +1949,7 @@
           <a:p>
             <a:fld id="{45B1BC09-D557-492E-9C5D-E4CF9E078DE2}" type="datetimeFigureOut">
               <a:rPr lang="en-US" smtClean="0"/>
-              <a:t>9/11/2026</a:t>
+              <a:t>9/12/2026</a:t>
             </a:fld>
             <a:endParaRPr lang="en-US"/>
           </a:p>
@@ -2063,7 +2063,7 @@
           <a:p>
             <a:fld id="{45B1BC09-D557-492E-9C5D-E4CF9E078DE2}" type="datetimeFigureOut">
               <a:rPr lang="en-US" smtClean="0"/>
-              <a:t>9/11/2026</a:t>
+              <a:t>9/12/2026</a:t>
             </a:fld>
             <a:endParaRPr lang="en-US"/>
           </a:p>
@@ -2366,7 +2366,7 @@
           <a:p>
             <a:fld id="{45B1BC09-D557-492E-9C5D-E4CF9E078DE2}" type="datetimeFigureOut">
               <a:rPr lang="en-US" smtClean="0"/>
-              <a:t>9/11/2026</a:t>
+              <a:t>9/12/2026</a:t>
             </a:fld>
             <a:endParaRPr lang="en-US"/>
           </a:p>
@@ -2646,7 +2646,7 @@
           <a:p>
             <a:fld id="{45B1BC09-D557-492E-9C5D-E4CF9E078DE2}" type="datetimeFigureOut">
               <a:rPr lang="en-US" smtClean="0"/>
-              <a:t>9/11/2026</a:t>
+              <a:t>9/12/2026</a:t>
             </a:fld>
             <a:endParaRPr lang="en-US"/>
           </a:p>
@@ -3408,7 +3408,7 @@
                 <a:latin typeface="Times New Roman" panose="02020603050405020304" pitchFamily="18" charset="0"/>
                 <a:cs typeface="Times New Roman" panose="02020603050405020304" pitchFamily="18" charset="0"/>
               </a:rPr>
-              <a:t>Email Analysis for Detecting Spam Messages </a:t>
+              <a:t>Email Content Analysis for Detecting Spam Messages </a:t>
             </a:r>
             <a:endParaRPr lang="en-US" sz="3600" b="1" dirty="0">
               <a:solidFill>
